--- a/lectures/lec2_arch.pptx
+++ b/lectures/lec2_arch.pptx
@@ -3188,31 +3188,87 @@
           <a:p>
             <a:pPr latinLnBrk="0"/>
             <a:r>
-              <a:rPr lang="en-US" altLang="zh-CN" sz="3600" dirty="0"/>
+              <a:rPr lang="en-US" altLang="zh-CN" sz="3600" b="1" dirty="0">
+                <a:solidFill>
+                  <a:schemeClr val="accent1">
+                    <a:lumMod val="75000"/>
+                  </a:schemeClr>
+                </a:solidFill>
+                <a:ea typeface="Helvetica Neue" panose="02000503000000020004" pitchFamily="2" charset="0"/>
+              </a:rPr>
               <a:t>CSCI3150</a:t>
             </a:r>
             <a:r>
-              <a:rPr lang="zh-CN" altLang="en-US" sz="3600" dirty="0"/>
+              <a:rPr lang="zh-CN" altLang="en-US" sz="3600" b="1" dirty="0">
+                <a:solidFill>
+                  <a:schemeClr val="accent1">
+                    <a:lumMod val="75000"/>
+                  </a:schemeClr>
+                </a:solidFill>
+              </a:rPr>
               <a:t> </a:t>
             </a:r>
             <a:r>
-              <a:rPr lang="en-US" altLang="zh-CN" sz="3600" dirty="0"/>
+              <a:rPr lang="en-US" altLang="zh-CN" sz="3600" b="1" dirty="0">
+                <a:solidFill>
+                  <a:schemeClr val="accent1">
+                    <a:lumMod val="75000"/>
+                  </a:schemeClr>
+                </a:solidFill>
+                <a:ea typeface="Helvetica Neue" panose="02000503000000020004" pitchFamily="2" charset="0"/>
+              </a:rPr>
               <a:t>Introduction</a:t>
             </a:r>
             <a:r>
-              <a:rPr lang="zh-CN" altLang="en-US" sz="3600" dirty="0"/>
+              <a:rPr lang="zh-CN" altLang="en-US" sz="3600" b="1" dirty="0">
+                <a:solidFill>
+                  <a:schemeClr val="accent1">
+                    <a:lumMod val="75000"/>
+                  </a:schemeClr>
+                </a:solidFill>
+              </a:rPr>
               <a:t> </a:t>
             </a:r>
             <a:r>
-              <a:rPr lang="en-US" altLang="zh-CN" sz="3600" dirty="0"/>
+              <a:rPr lang="en-US" altLang="zh-CN" sz="3600" b="1" dirty="0">
+                <a:solidFill>
+                  <a:schemeClr val="accent1">
+                    <a:lumMod val="75000"/>
+                  </a:schemeClr>
+                </a:solidFill>
+                <a:ea typeface="Helvetica Neue" panose="02000503000000020004" pitchFamily="2" charset="0"/>
+              </a:rPr>
               <a:t>to</a:t>
             </a:r>
             <a:r>
-              <a:rPr lang="zh-CN" altLang="en-US" sz="3600" dirty="0"/>
+              <a:rPr lang="zh-CN" altLang="en-US" sz="3600" b="1" dirty="0">
+                <a:solidFill>
+                  <a:schemeClr val="accent1">
+                    <a:lumMod val="75000"/>
+                  </a:schemeClr>
+                </a:solidFill>
+              </a:rPr>
               <a:t> </a:t>
             </a:r>
-            <a:r>
-              <a:rPr lang="en-US" sz="3600" dirty="0"/>
+            <a:br>
+              <a:rPr lang="en-HK" altLang="zh-CN" sz="3600" b="1" dirty="0">
+                <a:solidFill>
+                  <a:schemeClr val="accent1">
+                    <a:lumMod val="75000"/>
+                  </a:schemeClr>
+                </a:solidFill>
+                <a:ea typeface="Helvetica Neue" panose="02000503000000020004" pitchFamily="2" charset="0"/>
+              </a:rPr>
+            </a:br>
+            <a:r>
+              <a:rPr lang="en-US" sz="3600" b="1" dirty="0">
+                <a:solidFill>
+                  <a:schemeClr val="accent1">
+                    <a:lumMod val="75000"/>
+                  </a:schemeClr>
+                </a:solidFill>
+                <a:ea typeface="Helvetica Neue" panose="02000503000000020004" pitchFamily="2" charset="0"/>
+              </a:rPr>
               <a:t>Operating Systems</a:t>
             </a:r>
             <a:endParaRPr lang="en-US" sz="1600" b="0" dirty="0"/>
